--- a/src/assets/JARS_flowchart/jars-quant-participant-flowchart.pptx
+++ b/src/assets/JARS_flowchart/jars-quant-participant-flowchart.pptx
@@ -945,7 +945,7 @@
                 <a:ea typeface="Arial" pitchFamily="34" charset="-122"/>
                 <a:cs typeface="Arial" pitchFamily="34" charset="-120"/>
               </a:rPr>
-              <a:t>(n = 164 logs from 47 students)</a:t>
+              <a:t>(n=164 logs from 47 students)</a:t>
             </a:r>
             <a:endParaRPr lang="en-US" sz="900" dirty="0"/>
           </a:p>
@@ -1011,7 +1011,7 @@
                 <a:ea typeface="Arial" pitchFamily="34" charset="-122"/>
                 <a:cs typeface="Arial" pitchFamily="34" charset="-120"/>
               </a:rPr>
-              <a:t>Excluded (total n = 3) because
+              <a:t>Excluded (total n=3) because
 </a:t>
             </a:r>
             <a:pPr algn="l" indent="0" marL="0">
@@ -1026,7 +1026,7 @@
                 <a:ea typeface="Arial" pitchFamily="34" charset="-122"/>
                 <a:cs typeface="Arial" pitchFamily="34" charset="-120"/>
               </a:rPr>
-              <a:t>Did not meet inclusion criteria (n = 3)
+              <a:t>Did not meet inclusion criteria (n=3)
 </a:t>
             </a:r>
             <a:pPr algn="l" indent="0" marL="0">
@@ -1245,7 +1245,7 @@
                 <a:ea typeface="Arial" pitchFamily="34" charset="-122"/>
                 <a:cs typeface="Arial" pitchFamily="34" charset="-120"/>
               </a:rPr>
-              <a:t>Eligible logs (n = 161)</a:t>
+              <a:t>Eligible logs (n=161)</a:t>
             </a:r>
             <a:endParaRPr lang="en-US" sz="900" dirty="0"/>
           </a:p>
@@ -1335,7 +1335,7 @@
                 <a:ea typeface="Arial" pitchFamily="34" charset="-122"/>
                 <a:cs typeface="Arial" pitchFamily="34" charset="-120"/>
               </a:rPr>
-              <a:t>Feedback Generation</a:t>
+              <a:t>Feedback generation</a:t>
             </a:r>
             <a:endParaRPr lang="en-US" sz="1100" dirty="0"/>
           </a:p>
@@ -1495,7 +1495,7 @@
                 <a:ea typeface="Arial" pitchFamily="34" charset="-122"/>
                 <a:cs typeface="Arial" pitchFamily="34" charset="-120"/>
               </a:rPr>
-              <a:t>Supervisor Feedback
+              <a:t>Supervisor feedback
 </a:t>
             </a:r>
             <a:pPr algn="l" indent="0" marL="0">
@@ -1510,7 +1510,7 @@
                 <a:ea typeface="Arial" pitchFamily="34" charset="-122"/>
                 <a:cs typeface="Arial" pitchFamily="34" charset="-120"/>
               </a:rPr>
-              <a:t>(n = 161)
+              <a:t>(n=161)
 </a:t>
             </a:r>
             <a:pPr algn="l" indent="0" marL="0">
@@ -1591,7 +1591,7 @@
                 <a:ea typeface="Arial" pitchFamily="34" charset="-122"/>
                 <a:cs typeface="Arial" pitchFamily="34" charset="-120"/>
               </a:rPr>
-              <a:t>AI Feedback
+              <a:t>AI feedback
 </a:t>
             </a:r>
             <a:pPr algn="l" indent="0" marL="0">
@@ -1606,7 +1606,7 @@
                 <a:ea typeface="Arial" pitchFamily="34" charset="-122"/>
                 <a:cs typeface="Arial" pitchFamily="34" charset="-120"/>
               </a:rPr>
-              <a:t>(n = 161)
+              <a:t>(n=161)
 </a:t>
             </a:r>
             <a:pPr algn="l" indent="0" marL="0">
@@ -1853,7 +1853,7 @@
                 <a:ea typeface="Arial" pitchFamily="34" charset="-122"/>
                 <a:cs typeface="Arial" pitchFamily="34" charset="-120"/>
               </a:rPr>
-              <a:t>Paired datasets assembled (n = 161)</a:t>
+              <a:t>Paired datasets assembled (n=161)</a:t>
             </a:r>
             <a:endParaRPr lang="en-US" sz="900" dirty="0"/>
           </a:p>
@@ -2313,7 +2313,7 @@
                 <a:ea typeface="Arial" pitchFamily="34" charset="-122"/>
                 <a:cs typeface="Arial" pitchFamily="34" charset="-120"/>
               </a:rPr>
-              <a:t>Quantitative Analysis
+              <a:t>Quantitative analysis
 </a:t>
             </a:r>
             <a:pPr algn="l" indent="0" marL="0">
@@ -2328,7 +2328,7 @@
                 <a:ea typeface="Arial" pitchFamily="34" charset="-122"/>
                 <a:cs typeface="Arial" pitchFamily="34" charset="-120"/>
               </a:rPr>
-              <a:t>n = 161 logs
+              <a:t>n=161 logs
 </a:t>
             </a:r>
             <a:pPr algn="l" indent="0" marL="0">
@@ -2343,7 +2343,7 @@
                 <a:ea typeface="Arial" pitchFamily="34" charset="-122"/>
                 <a:cs typeface="Arial" pitchFamily="34" charset="-120"/>
               </a:rPr>
-              <a:t>3,220 observations</a:t>
+              <a:t>3220 observations</a:t>
             </a:r>
             <a:endParaRPr lang="en-US" sz="900" dirty="0"/>
           </a:p>
@@ -2409,7 +2409,7 @@
                 <a:ea typeface="Arial" pitchFamily="34" charset="-122"/>
                 <a:cs typeface="Arial" pitchFamily="34" charset="-120"/>
               </a:rPr>
-              <a:t>Qualitative Analysis
+              <a:t>Qualitative analysis
 </a:t>
             </a:r>
             <a:pPr algn="l" indent="0" marL="0">
@@ -2424,7 +2424,7 @@
                 <a:ea typeface="Arial" pitchFamily="34" charset="-122"/>
                 <a:cs typeface="Arial" pitchFamily="34" charset="-120"/>
               </a:rPr>
-              <a:t>n = 161 logs
+              <a:t>n=161 logs
 </a:t>
             </a:r>
             <a:pPr algn="l" indent="0" marL="0">
